--- a/ゲーム科1年/00_前期/ゲームエンジンⅠ/08_衝突処理.pptx
+++ b/ゲーム科1年/00_前期/ゲームエンジンⅠ/08_衝突処理.pptx
@@ -278,7 +278,7 @@
           <a:p>
             <a:fld id="{E9CC885B-4903-4D54-9A93-00025F12DED9}" type="datetimeFigureOut">
               <a:rPr kumimoji="1" lang="ja-JP" altLang="en-US" smtClean="0"/>
-              <a:t>2024/10/4</a:t>
+              <a:t>2025/3/5</a:t>
             </a:fld>
             <a:endParaRPr kumimoji="1" lang="ja-JP" altLang="en-US"/>
           </a:p>
@@ -508,7 +508,7 @@
           <a:p>
             <a:fld id="{E9CC885B-4903-4D54-9A93-00025F12DED9}" type="datetimeFigureOut">
               <a:rPr kumimoji="1" lang="ja-JP" altLang="en-US" smtClean="0"/>
-              <a:t>2024/10/4</a:t>
+              <a:t>2025/3/5</a:t>
             </a:fld>
             <a:endParaRPr kumimoji="1" lang="ja-JP" altLang="en-US"/>
           </a:p>
@@ -748,7 +748,7 @@
           <a:p>
             <a:fld id="{E9CC885B-4903-4D54-9A93-00025F12DED9}" type="datetimeFigureOut">
               <a:rPr kumimoji="1" lang="ja-JP" altLang="en-US" smtClean="0"/>
-              <a:t>2024/10/4</a:t>
+              <a:t>2025/3/5</a:t>
             </a:fld>
             <a:endParaRPr kumimoji="1" lang="ja-JP" altLang="en-US"/>
           </a:p>
@@ -978,7 +978,7 @@
           <a:p>
             <a:fld id="{E9CC885B-4903-4D54-9A93-00025F12DED9}" type="datetimeFigureOut">
               <a:rPr kumimoji="1" lang="ja-JP" altLang="en-US" smtClean="0"/>
-              <a:t>2024/10/4</a:t>
+              <a:t>2025/3/5</a:t>
             </a:fld>
             <a:endParaRPr kumimoji="1" lang="ja-JP" altLang="en-US"/>
           </a:p>
@@ -1253,7 +1253,7 @@
           <a:p>
             <a:fld id="{E9CC885B-4903-4D54-9A93-00025F12DED9}" type="datetimeFigureOut">
               <a:rPr kumimoji="1" lang="ja-JP" altLang="en-US" smtClean="0"/>
-              <a:t>2024/10/4</a:t>
+              <a:t>2025/3/5</a:t>
             </a:fld>
             <a:endParaRPr kumimoji="1" lang="ja-JP" altLang="en-US"/>
           </a:p>
@@ -1582,7 +1582,7 @@
           <a:p>
             <a:fld id="{E9CC885B-4903-4D54-9A93-00025F12DED9}" type="datetimeFigureOut">
               <a:rPr kumimoji="1" lang="ja-JP" altLang="en-US" smtClean="0"/>
-              <a:t>2024/10/4</a:t>
+              <a:t>2025/3/5</a:t>
             </a:fld>
             <a:endParaRPr kumimoji="1" lang="ja-JP" altLang="en-US"/>
           </a:p>
@@ -2058,7 +2058,7 @@
           <a:p>
             <a:fld id="{E9CC885B-4903-4D54-9A93-00025F12DED9}" type="datetimeFigureOut">
               <a:rPr kumimoji="1" lang="ja-JP" altLang="en-US" smtClean="0"/>
-              <a:t>2024/10/4</a:t>
+              <a:t>2025/3/5</a:t>
             </a:fld>
             <a:endParaRPr kumimoji="1" lang="ja-JP" altLang="en-US"/>
           </a:p>
@@ -2199,7 +2199,7 @@
           <a:p>
             <a:fld id="{E9CC885B-4903-4D54-9A93-00025F12DED9}" type="datetimeFigureOut">
               <a:rPr kumimoji="1" lang="ja-JP" altLang="en-US" smtClean="0"/>
-              <a:t>2024/10/4</a:t>
+              <a:t>2025/3/5</a:t>
             </a:fld>
             <a:endParaRPr kumimoji="1" lang="ja-JP" altLang="en-US"/>
           </a:p>
@@ -2312,7 +2312,7 @@
           <a:p>
             <a:fld id="{E9CC885B-4903-4D54-9A93-00025F12DED9}" type="datetimeFigureOut">
               <a:rPr kumimoji="1" lang="ja-JP" altLang="en-US" smtClean="0"/>
-              <a:t>2024/10/4</a:t>
+              <a:t>2025/3/5</a:t>
             </a:fld>
             <a:endParaRPr kumimoji="1" lang="ja-JP" altLang="en-US"/>
           </a:p>
@@ -2655,7 +2655,7 @@
           <a:p>
             <a:fld id="{E9CC885B-4903-4D54-9A93-00025F12DED9}" type="datetimeFigureOut">
               <a:rPr kumimoji="1" lang="ja-JP" altLang="en-US" smtClean="0"/>
-              <a:t>2024/10/4</a:t>
+              <a:t>2025/3/5</a:t>
             </a:fld>
             <a:endParaRPr kumimoji="1" lang="ja-JP" altLang="en-US"/>
           </a:p>
@@ -2943,7 +2943,7 @@
           <a:p>
             <a:fld id="{E9CC885B-4903-4D54-9A93-00025F12DED9}" type="datetimeFigureOut">
               <a:rPr kumimoji="1" lang="ja-JP" altLang="en-US" smtClean="0"/>
-              <a:t>2024/10/4</a:t>
+              <a:t>2025/3/5</a:t>
             </a:fld>
             <a:endParaRPr kumimoji="1" lang="ja-JP" altLang="en-US"/>
           </a:p>
@@ -3216,7 +3216,7 @@
           <a:p>
             <a:fld id="{E9CC885B-4903-4D54-9A93-00025F12DED9}" type="datetimeFigureOut">
               <a:rPr kumimoji="1" lang="ja-JP" altLang="en-US" smtClean="0"/>
-              <a:t>2024/10/4</a:t>
+              <a:t>2025/3/5</a:t>
             </a:fld>
             <a:endParaRPr kumimoji="1" lang="ja-JP" altLang="en-US"/>
           </a:p>
@@ -3809,7 +3809,7 @@
         <p:spPr>
           <a:xfrm>
             <a:off x="567542" y="1216429"/>
-            <a:ext cx="10608994" cy="1200329"/>
+            <a:ext cx="10697159" cy="830997"/>
           </a:xfrm>
           <a:prstGeom prst="rect">
             <a:avLst/>
@@ -3821,13 +3821,6 @@
             <a:spAutoFit/>
           </a:bodyPr>
           <a:lstStyle/>
-          <a:p>
-            <a:r>
-              <a:rPr lang="ja-JP" altLang="en-US" sz="2400" dirty="0"/>
-              <a:t>実行するとジャンプしたときなど、</a:t>
-            </a:r>
-            <a:endParaRPr lang="en-US" altLang="ja-JP" sz="2400" dirty="0"/>
-          </a:p>
           <a:p>
             <a:r>
               <a:rPr lang="ja-JP" altLang="en-US" sz="2400" dirty="0"/>
@@ -3874,7 +3867,7 @@
         </p:blipFill>
         <p:spPr>
           <a:xfrm>
-            <a:off x="567542" y="2556458"/>
+            <a:off x="567542" y="2187126"/>
             <a:ext cx="7102923" cy="3809588"/>
           </a:xfrm>
           <a:prstGeom prst="rect">
@@ -5994,7 +5987,7 @@
         <p:spPr>
           <a:xfrm>
             <a:off x="567542" y="4415865"/>
-            <a:ext cx="10078400" cy="461665"/>
+            <a:ext cx="10245112" cy="461665"/>
           </a:xfrm>
           <a:prstGeom prst="rect">
             <a:avLst/>
@@ -6012,12 +6005,24 @@
               <a:t>※</a:t>
             </a:r>
             <a:r>
-              <a:rPr kumimoji="1" lang="en-US" altLang="ja-JP" sz="2400" dirty="0" err="1"/>
+              <a:rPr kumimoji="1" lang="en-US" altLang="ja-JP" sz="2400" b="1" dirty="0" err="1">
+                <a:solidFill>
+                  <a:srgbClr val="0070C0"/>
+                </a:solidFill>
+              </a:rPr>
               <a:t>Debug.Log</a:t>
             </a:r>
             <a:r>
+              <a:rPr kumimoji="1" lang="ja-JP" altLang="en-US" sz="2400" b="1" dirty="0">
+                <a:solidFill>
+                  <a:srgbClr val="0070C0"/>
+                </a:solidFill>
+              </a:rPr>
+              <a:t>関数</a:t>
+            </a:r>
+            <a:r>
               <a:rPr kumimoji="1" lang="ja-JP" altLang="en-US" sz="2400" dirty="0"/>
-              <a:t>関数は</a:t>
+              <a:t>は</a:t>
             </a:r>
             <a:r>
               <a:rPr kumimoji="1" lang="en-US" altLang="ja-JP" sz="2400" dirty="0"/>
@@ -6311,7 +6316,7 @@
         <p:spPr>
           <a:xfrm>
             <a:off x="567542" y="1216429"/>
-            <a:ext cx="9953366" cy="830997"/>
+            <a:ext cx="9411551" cy="830997"/>
           </a:xfrm>
           <a:prstGeom prst="rect">
             <a:avLst/>
@@ -6358,7 +6363,7 @@
                   <a:srgbClr val="FF0000"/>
                 </a:solidFill>
               </a:rPr>
-              <a:t>に接触したときに１度だけ呼ばれる</a:t>
+              <a:t>に接触した瞬間に呼ばれる</a:t>
             </a:r>
             <a:r>
               <a:rPr lang="ja-JP" altLang="en-US" sz="2400" dirty="0"/>
@@ -6557,7 +6562,7 @@
         <p:spPr>
           <a:xfrm>
             <a:off x="567542" y="1216429"/>
-            <a:ext cx="8868133" cy="461665"/>
+            <a:ext cx="8582799" cy="461665"/>
           </a:xfrm>
           <a:prstGeom prst="rect">
             <a:avLst/>
@@ -6576,7 +6581,7 @@
             </a:r>
             <a:r>
               <a:rPr lang="en-US" altLang="ja-JP" sz="2400" dirty="0" err="1"/>
-              <a:t>OnCollisionEnter</a:t>
+              <a:t>OnCollisionStay</a:t>
             </a:r>
             <a:r>
               <a:rPr lang="ja-JP" altLang="en-US" sz="2400" dirty="0"/>
